--- a/slide/themes/src/23_luminescentia.pptx
+++ b/slide/themes/src/23_luminescentia.pptx
@@ -2501,9 +2501,6 @@
                 <a:solidFill>
                   <a:schemeClr val="bg1"/>
                 </a:solidFill>
-                <a:latin typeface="Times New Roman"/>
-                <a:ea typeface="Times New Roman"/>
-                <a:cs typeface="Times New Roman"/>
               </a:defRPr>
             </a:lvl1pPr>
             <a:lvl2pPr algn="l">
@@ -2511,9 +2508,6 @@
                 <a:solidFill>
                   <a:schemeClr val="bg1"/>
                 </a:solidFill>
-                <a:latin typeface="Times New Roman"/>
-                <a:ea typeface="Times New Roman"/>
-                <a:cs typeface="Times New Roman"/>
               </a:defRPr>
             </a:lvl2pPr>
             <a:lvl3pPr algn="l">
@@ -2521,9 +2515,6 @@
                 <a:solidFill>
                   <a:schemeClr val="bg1"/>
                 </a:solidFill>
-                <a:latin typeface="Times New Roman"/>
-                <a:ea typeface="Times New Roman"/>
-                <a:cs typeface="Times New Roman"/>
               </a:defRPr>
             </a:lvl3pPr>
             <a:lvl4pPr algn="l">
@@ -2531,9 +2522,6 @@
                 <a:solidFill>
                   <a:schemeClr val="bg1"/>
                 </a:solidFill>
-                <a:latin typeface="Times New Roman"/>
-                <a:ea typeface="Times New Roman"/>
-                <a:cs typeface="Times New Roman"/>
               </a:defRPr>
             </a:lvl4pPr>
             <a:lvl5pPr algn="l">
@@ -2541,9 +2529,6 @@
                 <a:solidFill>
                   <a:schemeClr val="bg1"/>
                 </a:solidFill>
-                <a:latin typeface="Times New Roman"/>
-                <a:ea typeface="Times New Roman"/>
-                <a:cs typeface="Times New Roman"/>
               </a:defRPr>
             </a:lvl5pPr>
             <a:lvl6pPr algn="l">
@@ -2551,9 +2536,6 @@
                 <a:solidFill>
                   <a:schemeClr val="bg1"/>
                 </a:solidFill>
-                <a:latin typeface="Times New Roman"/>
-                <a:ea typeface="Times New Roman"/>
-                <a:cs typeface="Times New Roman"/>
               </a:defRPr>
             </a:lvl6pPr>
             <a:lvl7pPr algn="l">
@@ -2561,9 +2543,6 @@
                 <a:solidFill>
                   <a:schemeClr val="bg1"/>
                 </a:solidFill>
-                <a:latin typeface="Times New Roman"/>
-                <a:ea typeface="Times New Roman"/>
-                <a:cs typeface="Times New Roman"/>
               </a:defRPr>
             </a:lvl7pPr>
             <a:lvl8pPr algn="l">
@@ -2571,9 +2550,6 @@
                 <a:solidFill>
                   <a:schemeClr val="bg1"/>
                 </a:solidFill>
-                <a:latin typeface="Times New Roman"/>
-                <a:ea typeface="Times New Roman"/>
-                <a:cs typeface="Times New Roman"/>
               </a:defRPr>
             </a:lvl8pPr>
             <a:lvl9pPr algn="l">
@@ -2581,9 +2557,6 @@
                 <a:solidFill>
                   <a:schemeClr val="bg1"/>
                 </a:solidFill>
-                <a:latin typeface="Times New Roman"/>
-                <a:ea typeface="Times New Roman"/>
-                <a:cs typeface="Times New Roman"/>
               </a:defRPr>
             </a:lvl9pPr>
           </a:lstStyle>
@@ -7930,9 +7903,6 @@
                     <a:lumMod val="75000"/>
                   </a:schemeClr>
                 </a:solidFill>
-                <a:latin typeface="Times New Roman"/>
-                <a:ea typeface="Times New Roman"/>
-                <a:cs typeface="Times New Roman"/>
               </a:defRPr>
             </a:lvl1pPr>
             <a:lvl2pPr>
@@ -7942,9 +7912,6 @@
                     <a:lumMod val="75000"/>
                   </a:schemeClr>
                 </a:solidFill>
-                <a:latin typeface="Times New Roman"/>
-                <a:ea typeface="Times New Roman"/>
-                <a:cs typeface="Times New Roman"/>
               </a:defRPr>
             </a:lvl2pPr>
             <a:lvl3pPr>
@@ -7954,9 +7921,6 @@
                     <a:lumMod val="75000"/>
                   </a:schemeClr>
                 </a:solidFill>
-                <a:latin typeface="Times New Roman"/>
-                <a:ea typeface="Times New Roman"/>
-                <a:cs typeface="Times New Roman"/>
               </a:defRPr>
             </a:lvl3pPr>
             <a:lvl4pPr>
@@ -7966,9 +7930,6 @@
                     <a:lumMod val="75000"/>
                   </a:schemeClr>
                 </a:solidFill>
-                <a:latin typeface="Times New Roman"/>
-                <a:ea typeface="Times New Roman"/>
-                <a:cs typeface="Times New Roman"/>
               </a:defRPr>
             </a:lvl4pPr>
             <a:lvl5pPr>
@@ -7978,9 +7939,6 @@
                     <a:lumMod val="75000"/>
                   </a:schemeClr>
                 </a:solidFill>
-                <a:latin typeface="Times New Roman"/>
-                <a:ea typeface="Times New Roman"/>
-                <a:cs typeface="Times New Roman"/>
               </a:defRPr>
             </a:lvl5pPr>
             <a:lvl6pPr>
@@ -7990,9 +7948,6 @@
                     <a:lumMod val="75000"/>
                   </a:schemeClr>
                 </a:solidFill>
-                <a:latin typeface="Times New Roman"/>
-                <a:ea typeface="Times New Roman"/>
-                <a:cs typeface="Times New Roman"/>
               </a:defRPr>
             </a:lvl6pPr>
             <a:lvl7pPr>
@@ -8002,9 +7957,6 @@
                     <a:lumMod val="75000"/>
                   </a:schemeClr>
                 </a:solidFill>
-                <a:latin typeface="Times New Roman"/>
-                <a:ea typeface="Times New Roman"/>
-                <a:cs typeface="Times New Roman"/>
               </a:defRPr>
             </a:lvl7pPr>
             <a:lvl8pPr>
@@ -8014,9 +7966,6 @@
                     <a:lumMod val="75000"/>
                   </a:schemeClr>
                 </a:solidFill>
-                <a:latin typeface="Times New Roman"/>
-                <a:ea typeface="Times New Roman"/>
-                <a:cs typeface="Times New Roman"/>
               </a:defRPr>
             </a:lvl8pPr>
             <a:lvl9pPr>
@@ -8026,9 +7975,6 @@
                     <a:lumMod val="75000"/>
                   </a:schemeClr>
                 </a:solidFill>
-                <a:latin typeface="Times New Roman"/>
-                <a:ea typeface="Times New Roman"/>
-                <a:cs typeface="Times New Roman"/>
               </a:defRPr>
             </a:lvl9pPr>
           </a:lstStyle>
@@ -8777,13 +8723,13 @@
     </a:clrScheme>
     <a:fontScheme name="Office Theme">
       <a:majorFont>
-        <a:latin typeface="Arial"/>
+        <a:latin typeface="Times New Roman"/>
         <a:ea typeface="SimSun"/>
-        <a:cs typeface="Arial"/>
+        <a:cs typeface="Times New Roman"/>
       </a:majorFont>
       <a:minorFont>
         <a:latin typeface="Arial"/>
-        <a:ea typeface="SimSun"/>
+        <a:ea typeface="Microsoft YaHei"/>
         <a:cs typeface="Arial"/>
       </a:minorFont>
     </a:fontScheme>
@@ -9014,13 +8960,13 @@
     </a:clrScheme>
     <a:fontScheme name="Arial">
       <a:majorFont>
-        <a:latin typeface="Arial"/>
-        <a:ea typeface="Arial"/>
-        <a:cs typeface="Arial"/>
+        <a:latin typeface="Times New Roman"/>
+        <a:ea typeface="SimSun"/>
+        <a:cs typeface="Times New Roman"/>
       </a:majorFont>
       <a:minorFont>
         <a:latin typeface="Arial"/>
-        <a:ea typeface="Arial"/>
+        <a:ea typeface="Microsoft YaHei"/>
         <a:cs typeface="Arial"/>
       </a:minorFont>
     </a:fontScheme>

--- a/slide/themes/src/23_luminescentia.pptx
+++ b/slide/themes/src/23_luminescentia.pptx
@@ -536,10 +536,7 @@
             <a:pPr>
               <a:defRPr/>
             </a:pPr>
-            <a:endParaRPr lang="en-US">
-              <a:latin typeface="Arial"/>
-              <a:cs typeface="Arial"/>
-            </a:endParaRPr>
+            <a:endParaRPr lang="en-US"/>
           </a:p>
         </p:txBody>
       </p:sp>
